--- a/slides/Toan11/Slide_TOAN11_Bai1_T1-3.pptx
+++ b/slides/Toan11/Slide_TOAN11_Bai1_T1-3.pptx
@@ -7494,7 +7494,7 @@
                 </a:pPr>
                 <a:r>
                   <a:rPr lang="vi-VN"/>
-                  <a:t>\tan\ \left(−\frac{\pi}{3}\right)=-\sqrt{3}</a:t>
+                  <a:t>\tan\ \left(−\frac{\pi}{3}\right)=−\sqrt{3}</a:t>
                 </a:r>
                 <a:r>
                   <a:rPr sz="2400">
@@ -9571,7 +9571,7 @@
                 </a:pPr>
                 <a:r>
                   <a:rPr lang="vi-VN"/>
-                  <a:t>\cos\ \alpha&lt;0\Rightarrow\cos\ \alpha=-\sqrt{1-\frac{9}{25}}=−\frac{4}{5}</a:t>
+                  <a:t>\cos\ \alpha&lt;0\Rightarrow\cos\ \alpha=−\sqrt{1−\frac{9}{25}}=−\frac{4}{5}</a:t>
                 </a:r>
               </a:p>
               <a:p>
@@ -11331,7 +11331,7 @@
                 </a:pPr>
                 <a:r>
                   <a:rPr lang="vi-VN"/>
-                  <a:t>\sin\ (-675^\circ)=\frac{\sqrt{2}}{2}</a:t>
+                  <a:t>\sin\ (−675^\circ)=\frac{\sqrt{2}}{2}</a:t>
                 </a:r>
                 <a:r>
                   <a:rPr sz="2400">
@@ -11344,7 +11344,7 @@
                 </a:r>
                 <a:r>
                   <a:rPr lang="vi-VN"/>
-                  <a:t>\tan\ \frac{15\pi}{4}=-1</a:t>
+                  <a:t>\tan\ \frac{15\pi}{4}=−1</a:t>
                 </a:r>
               </a:p>
             </p:txBody>
